--- a/assets/Meet_Team_Apex_Architects.pptx
+++ b/assets/Meet_Team_Apex_Architects.pptx
@@ -153,7 +153,7 @@
         <p:txBody>
           <a:bodyPr/>
           <a:p>
-            <a:fld id="{09D25AFD-7D1C-4920-B23D-2F7FD4D68C16}" type="slidenum">
+            <a:fld id="{0BC107B5-5969-49BD-AD31-64BF8D6BBD83}" type="slidenum">
               <a:t>&lt;#&gt;</a:t>
             </a:fld>
           </a:p>
@@ -236,7 +236,7 @@
         <p:txBody>
           <a:bodyPr/>
           <a:p>
-            <a:fld id="{F7D0FD56-26C2-4158-8D15-93B07E870FCE}" type="slidenum">
+            <a:fld id="{B7DC2AC7-A06C-49F9-A04A-B5E57296ED12}" type="slidenum">
               <a:t>&lt;#&gt;</a:t>
             </a:fld>
           </a:p>
@@ -319,7 +319,7 @@
         <p:txBody>
           <a:bodyPr/>
           <a:p>
-            <a:fld id="{3B0C01D2-034D-4CC1-BEAB-2FD3D2305C79}" type="slidenum">
+            <a:fld id="{A701C42A-780B-43F4-B0B0-120ED822AD5F}" type="slidenum">
               <a:t>&lt;#&gt;</a:t>
             </a:fld>
           </a:p>
@@ -402,7 +402,7 @@
         <p:txBody>
           <a:bodyPr/>
           <a:p>
-            <a:fld id="{12AF3CF6-D13D-4943-9AE5-A89FE9971874}" type="slidenum">
+            <a:fld id="{E5E7C8ED-31D8-4DA5-A4F3-569740F08A55}" type="slidenum">
               <a:t>&lt;#&gt;</a:t>
             </a:fld>
           </a:p>
@@ -485,7 +485,7 @@
         <p:txBody>
           <a:bodyPr/>
           <a:p>
-            <a:fld id="{BEE233F5-C9C7-4D1E-9026-BD0B32E31F0C}" type="slidenum">
+            <a:fld id="{FE0DA969-86D0-41C7-8612-6ED6AB404AB1}" type="slidenum">
               <a:t>&lt;#&gt;</a:t>
             </a:fld>
           </a:p>
@@ -651,7 +651,7 @@
         <p:txBody>
           <a:bodyPr/>
           <a:p>
-            <a:fld id="{CCA4BBE7-6F9F-4EAE-A201-F44A0C9D95BD}" type="slidenum">
+            <a:fld id="{BC419809-A256-417B-A347-236A5FC0AE2B}" type="slidenum">
               <a:t>&lt;#&gt;</a:t>
             </a:fld>
           </a:p>
@@ -734,7 +734,7 @@
         <p:txBody>
           <a:bodyPr/>
           <a:p>
-            <a:fld id="{76590496-6F9C-40E4-A262-C977B559C55B}" type="slidenum">
+            <a:fld id="{6D6C1144-36FF-487E-8BAD-A0C682A2B254}" type="slidenum">
               <a:t>&lt;#&gt;</a:t>
             </a:fld>
           </a:p>
@@ -943,7 +943,7 @@
         <p:txBody>
           <a:bodyPr/>
           <a:p>
-            <a:fld id="{3E64CF27-9E74-4548-9445-A36D3C0690F2}" type="slidenum">
+            <a:fld id="{2F770F58-4E39-4EBC-8F38-C48145C38DDC}" type="slidenum">
               <a:t>&lt;#&gt;</a:t>
             </a:fld>
           </a:p>
@@ -1026,7 +1026,7 @@
         <p:txBody>
           <a:bodyPr/>
           <a:p>
-            <a:fld id="{B37794DC-CE96-42C1-9163-3721D5FEA65A}" type="slidenum">
+            <a:fld id="{42C8BD14-87BC-48BD-A221-D5CAB405F84D}" type="slidenum">
               <a:t>&lt;#&gt;</a:t>
             </a:fld>
           </a:p>
@@ -1149,7 +1149,7 @@
         <p:txBody>
           <a:bodyPr/>
           <a:p>
-            <a:fld id="{27D11867-2217-462F-BEC4-400FDAC64D34}" type="slidenum">
+            <a:fld id="{CA70CA94-D3D2-441C-9ED4-1E42CF981279}" type="slidenum">
               <a:t>&lt;#&gt;</a:t>
             </a:fld>
           </a:p>
@@ -1232,7 +1232,7 @@
         <p:txBody>
           <a:bodyPr/>
           <a:p>
-            <a:fld id="{649FF840-EC32-460B-A7B5-996B15B1BD3E}" type="slidenum">
+            <a:fld id="{B3345E2D-64D4-45FD-8542-8FFAC3CEB332}" type="slidenum">
               <a:t>&lt;#&gt;</a:t>
             </a:fld>
           </a:p>
@@ -1350,7 +1350,7 @@
         <p:spPr>
           <a:xfrm>
             <a:off x="4038480" y="6356520"/>
-            <a:ext cx="4113720" cy="363960"/>
+            <a:ext cx="4113360" cy="363600"/>
           </a:xfrm>
           <a:prstGeom prst="rect">
             <a:avLst/>
@@ -1422,7 +1422,7 @@
         <p:spPr>
           <a:xfrm>
             <a:off x="8610480" y="6356520"/>
-            <a:ext cx="2742120" cy="363960"/>
+            <a:ext cx="2741760" cy="363600"/>
           </a:xfrm>
           <a:prstGeom prst="rect">
             <a:avLst/>
@@ -1465,7 +1465,7 @@
                 <a:tab algn="l" pos="0"/>
               </a:tabLst>
             </a:pPr>
-            <a:fld id="{5FFF772E-2ABA-4305-BB78-D7F0198C63C9}" type="slidenum">
+            <a:fld id="{C58BFAFA-2193-45BE-9803-4455DE732C65}" type="slidenum">
               <a:rPr b="0" lang="en-IN" sz="1200" spc="-1" strike="noStrike">
                 <a:solidFill>
                   <a:schemeClr val="dk1">
@@ -1498,7 +1498,7 @@
         <p:spPr>
           <a:xfrm>
             <a:off x="838080" y="6356520"/>
-            <a:ext cx="2742120" cy="363960"/>
+            <a:ext cx="2741760" cy="363600"/>
           </a:xfrm>
           <a:prstGeom prst="rect">
             <a:avLst/>
@@ -1591,7 +1591,7 @@
         <p:spPr>
           <a:xfrm>
             <a:off x="4038480" y="6356520"/>
-            <a:ext cx="4113720" cy="363960"/>
+            <a:ext cx="4113360" cy="363600"/>
           </a:xfrm>
           <a:prstGeom prst="rect">
             <a:avLst/>
@@ -1663,7 +1663,7 @@
         <p:spPr>
           <a:xfrm>
             <a:off x="8610480" y="6356520"/>
-            <a:ext cx="2742120" cy="363960"/>
+            <a:ext cx="2741760" cy="363600"/>
           </a:xfrm>
           <a:prstGeom prst="rect">
             <a:avLst/>
@@ -1706,7 +1706,7 @@
                 <a:tab algn="l" pos="0"/>
               </a:tabLst>
             </a:pPr>
-            <a:fld id="{DDE86DD8-75E7-40DD-BF07-1EC599BE1588}" type="slidenum">
+            <a:fld id="{120E0D53-8901-48BE-9048-D7921DEC8E90}" type="slidenum">
               <a:rPr b="0" lang="en-IN" sz="1200" spc="-1" strike="noStrike">
                 <a:solidFill>
                   <a:schemeClr val="dk1">
@@ -1739,7 +1739,7 @@
         <p:spPr>
           <a:xfrm>
             <a:off x="838080" y="6356520"/>
-            <a:ext cx="2742120" cy="363960"/>
+            <a:ext cx="2741760" cy="363600"/>
           </a:xfrm>
           <a:prstGeom prst="rect">
             <a:avLst/>
@@ -1832,7 +1832,7 @@
         <p:spPr>
           <a:xfrm>
             <a:off x="4038480" y="6356520"/>
-            <a:ext cx="4113720" cy="363960"/>
+            <a:ext cx="4113360" cy="363600"/>
           </a:xfrm>
           <a:prstGeom prst="rect">
             <a:avLst/>
@@ -1904,7 +1904,7 @@
         <p:spPr>
           <a:xfrm>
             <a:off x="8610480" y="6356520"/>
-            <a:ext cx="2742120" cy="363960"/>
+            <a:ext cx="2741760" cy="363600"/>
           </a:xfrm>
           <a:prstGeom prst="rect">
             <a:avLst/>
@@ -1947,7 +1947,7 @@
                 <a:tab algn="l" pos="0"/>
               </a:tabLst>
             </a:pPr>
-            <a:fld id="{99537464-1EDC-4B30-AFBD-FEB0AA2CECD6}" type="slidenum">
+            <a:fld id="{3B54AC89-0413-4C79-9233-1A33437DBFC1}" type="slidenum">
               <a:rPr b="0" lang="en-IN" sz="1200" spc="-1" strike="noStrike">
                 <a:solidFill>
                   <a:schemeClr val="dk1">
@@ -1980,7 +1980,7 @@
         <p:spPr>
           <a:xfrm>
             <a:off x="838080" y="6356520"/>
-            <a:ext cx="2742120" cy="363960"/>
+            <a:ext cx="2741760" cy="363600"/>
           </a:xfrm>
           <a:prstGeom prst="rect">
             <a:avLst/>
@@ -2073,7 +2073,7 @@
         <p:spPr>
           <a:xfrm>
             <a:off x="4038480" y="6356520"/>
-            <a:ext cx="4113720" cy="363960"/>
+            <a:ext cx="4113360" cy="363600"/>
           </a:xfrm>
           <a:prstGeom prst="rect">
             <a:avLst/>
@@ -2145,7 +2145,7 @@
         <p:spPr>
           <a:xfrm>
             <a:off x="8610480" y="6356520"/>
-            <a:ext cx="2742120" cy="363960"/>
+            <a:ext cx="2741760" cy="363600"/>
           </a:xfrm>
           <a:prstGeom prst="rect">
             <a:avLst/>
@@ -2188,7 +2188,7 @@
                 <a:tab algn="l" pos="0"/>
               </a:tabLst>
             </a:pPr>
-            <a:fld id="{28452E1C-9450-4641-A689-38660E82AAF3}" type="slidenum">
+            <a:fld id="{C5695933-21D4-47EE-B12C-B8437457EE6C}" type="slidenum">
               <a:rPr b="0" lang="en-IN" sz="1200" spc="-1" strike="noStrike">
                 <a:solidFill>
                   <a:schemeClr val="dk1">
@@ -2221,7 +2221,7 @@
         <p:spPr>
           <a:xfrm>
             <a:off x="838080" y="6356520"/>
-            <a:ext cx="2742120" cy="363960"/>
+            <a:ext cx="2741760" cy="363600"/>
           </a:xfrm>
           <a:prstGeom prst="rect">
             <a:avLst/>
@@ -2314,7 +2314,7 @@
         <p:spPr>
           <a:xfrm>
             <a:off x="4038480" y="6356520"/>
-            <a:ext cx="4113720" cy="363960"/>
+            <a:ext cx="4113360" cy="363600"/>
           </a:xfrm>
           <a:prstGeom prst="rect">
             <a:avLst/>
@@ -2386,7 +2386,7 @@
         <p:spPr>
           <a:xfrm>
             <a:off x="8610480" y="6356520"/>
-            <a:ext cx="2742120" cy="363960"/>
+            <a:ext cx="2741760" cy="363600"/>
           </a:xfrm>
           <a:prstGeom prst="rect">
             <a:avLst/>
@@ -2429,7 +2429,7 @@
                 <a:tab algn="l" pos="0"/>
               </a:tabLst>
             </a:pPr>
-            <a:fld id="{1563F63E-B2AF-4F1B-B04C-6F7DD5648010}" type="slidenum">
+            <a:fld id="{C684BCAE-FA30-4EB2-B866-18670912859E}" type="slidenum">
               <a:rPr b="0" lang="en-IN" sz="1200" spc="-1" strike="noStrike">
                 <a:solidFill>
                   <a:schemeClr val="dk1">
@@ -2462,7 +2462,7 @@
         <p:spPr>
           <a:xfrm>
             <a:off x="838080" y="6356520"/>
-            <a:ext cx="2742120" cy="363960"/>
+            <a:ext cx="2741760" cy="363600"/>
           </a:xfrm>
           <a:prstGeom prst="rect">
             <a:avLst/>
@@ -2829,7 +2829,7 @@
         <p:spPr>
           <a:xfrm>
             <a:off x="4038480" y="6356520"/>
-            <a:ext cx="4113720" cy="363960"/>
+            <a:ext cx="4113360" cy="363600"/>
           </a:xfrm>
           <a:prstGeom prst="rect">
             <a:avLst/>
@@ -2901,7 +2901,7 @@
         <p:spPr>
           <a:xfrm>
             <a:off x="8610480" y="6356520"/>
-            <a:ext cx="2742120" cy="363960"/>
+            <a:ext cx="2741760" cy="363600"/>
           </a:xfrm>
           <a:prstGeom prst="rect">
             <a:avLst/>
@@ -2944,7 +2944,7 @@
                 <a:tab algn="l" pos="0"/>
               </a:tabLst>
             </a:pPr>
-            <a:fld id="{FABD5B26-E3B9-4B7F-8F09-8D86A5A6846A}" type="slidenum">
+            <a:fld id="{2A7C5B5D-C18D-4D09-8AA1-C47D8D77C5F3}" type="slidenum">
               <a:rPr b="0" lang="en-IN" sz="1200" spc="-1" strike="noStrike">
                 <a:solidFill>
                   <a:schemeClr val="dk1">
@@ -2977,7 +2977,7 @@
         <p:spPr>
           <a:xfrm>
             <a:off x="838080" y="6356520"/>
-            <a:ext cx="2742120" cy="363960"/>
+            <a:ext cx="2741760" cy="363600"/>
           </a:xfrm>
           <a:prstGeom prst="rect">
             <a:avLst/>
@@ -3070,7 +3070,7 @@
         <p:spPr>
           <a:xfrm>
             <a:off x="4038480" y="6356520"/>
-            <a:ext cx="4113720" cy="363960"/>
+            <a:ext cx="4113360" cy="363600"/>
           </a:xfrm>
           <a:prstGeom prst="rect">
             <a:avLst/>
@@ -3142,7 +3142,7 @@
         <p:spPr>
           <a:xfrm>
             <a:off x="8610480" y="6356520"/>
-            <a:ext cx="2742120" cy="363960"/>
+            <a:ext cx="2741760" cy="363600"/>
           </a:xfrm>
           <a:prstGeom prst="rect">
             <a:avLst/>
@@ -3185,7 +3185,7 @@
                 <a:tab algn="l" pos="0"/>
               </a:tabLst>
             </a:pPr>
-            <a:fld id="{D3F42D87-AA67-477A-A26E-27E940460CF4}" type="slidenum">
+            <a:fld id="{1D1CE3FC-DD58-4DD0-BE0E-8823012F0A4F}" type="slidenum">
               <a:rPr b="0" lang="en-IN" sz="1200" spc="-1" strike="noStrike">
                 <a:solidFill>
                   <a:schemeClr val="dk1">
@@ -3218,7 +3218,7 @@
         <p:spPr>
           <a:xfrm>
             <a:off x="838080" y="6356520"/>
-            <a:ext cx="2742120" cy="363960"/>
+            <a:ext cx="2741760" cy="363600"/>
           </a:xfrm>
           <a:prstGeom prst="rect">
             <a:avLst/>
@@ -3810,7 +3810,7 @@
         <p:spPr>
           <a:xfrm>
             <a:off x="4038480" y="6356520"/>
-            <a:ext cx="4113720" cy="363960"/>
+            <a:ext cx="4113360" cy="363600"/>
           </a:xfrm>
           <a:prstGeom prst="rect">
             <a:avLst/>
@@ -3882,7 +3882,7 @@
         <p:spPr>
           <a:xfrm>
             <a:off x="8610480" y="6356520"/>
-            <a:ext cx="2742120" cy="363960"/>
+            <a:ext cx="2741760" cy="363600"/>
           </a:xfrm>
           <a:prstGeom prst="rect">
             <a:avLst/>
@@ -3925,7 +3925,7 @@
                 <a:tab algn="l" pos="0"/>
               </a:tabLst>
             </a:pPr>
-            <a:fld id="{FDA2A384-9E28-4BAB-96BA-AFAD1F7F5B5C}" type="slidenum">
+            <a:fld id="{33A466E4-5988-435B-ABEA-6272A18105AE}" type="slidenum">
               <a:rPr b="0" lang="en-IN" sz="1200" spc="-1" strike="noStrike">
                 <a:solidFill>
                   <a:schemeClr val="dk1">
@@ -3958,7 +3958,7 @@
         <p:spPr>
           <a:xfrm>
             <a:off x="838080" y="6356520"/>
-            <a:ext cx="2742120" cy="363960"/>
+            <a:ext cx="2741760" cy="363600"/>
           </a:xfrm>
           <a:prstGeom prst="rect">
             <a:avLst/>
@@ -4051,7 +4051,7 @@
         <p:spPr>
           <a:xfrm>
             <a:off x="4038480" y="6356520"/>
-            <a:ext cx="4113720" cy="363960"/>
+            <a:ext cx="4113360" cy="363600"/>
           </a:xfrm>
           <a:prstGeom prst="rect">
             <a:avLst/>
@@ -4123,7 +4123,7 @@
         <p:spPr>
           <a:xfrm>
             <a:off x="8610480" y="6356520"/>
-            <a:ext cx="2742120" cy="363960"/>
+            <a:ext cx="2741760" cy="363600"/>
           </a:xfrm>
           <a:prstGeom prst="rect">
             <a:avLst/>
@@ -4166,7 +4166,7 @@
                 <a:tab algn="l" pos="0"/>
               </a:tabLst>
             </a:pPr>
-            <a:fld id="{E298AE8E-5375-4D83-B147-5922922BD1E1}" type="slidenum">
+            <a:fld id="{1F4C61CE-8B15-4406-BF23-CF8AF4B1FCE7}" type="slidenum">
               <a:rPr b="0" lang="en-IN" sz="1200" spc="-1" strike="noStrike">
                 <a:solidFill>
                   <a:schemeClr val="dk1">
@@ -4199,7 +4199,7 @@
         <p:spPr>
           <a:xfrm>
             <a:off x="838080" y="6356520"/>
-            <a:ext cx="2742120" cy="363960"/>
+            <a:ext cx="2741760" cy="363600"/>
           </a:xfrm>
           <a:prstGeom prst="rect">
             <a:avLst/>
@@ -4341,7 +4341,7 @@
         <p:spPr>
           <a:xfrm>
             <a:off x="4038480" y="6356520"/>
-            <a:ext cx="4113720" cy="363960"/>
+            <a:ext cx="4113360" cy="363600"/>
           </a:xfrm>
           <a:prstGeom prst="rect">
             <a:avLst/>
@@ -4413,7 +4413,7 @@
         <p:spPr>
           <a:xfrm>
             <a:off x="8610480" y="6356520"/>
-            <a:ext cx="2742120" cy="363960"/>
+            <a:ext cx="2741760" cy="363600"/>
           </a:xfrm>
           <a:prstGeom prst="rect">
             <a:avLst/>
@@ -4456,7 +4456,7 @@
                 <a:tab algn="l" pos="0"/>
               </a:tabLst>
             </a:pPr>
-            <a:fld id="{95DDF85F-8DD4-4626-88C3-B7C5AD9A159B}" type="slidenum">
+            <a:fld id="{D34F6B89-5522-44FB-99D1-87E65CB61735}" type="slidenum">
               <a:rPr b="0" lang="en-IN" sz="1200" spc="-1" strike="noStrike">
                 <a:solidFill>
                   <a:schemeClr val="dk1">
@@ -4489,7 +4489,7 @@
         <p:spPr>
           <a:xfrm>
             <a:off x="838080" y="6356520"/>
-            <a:ext cx="2742120" cy="363960"/>
+            <a:ext cx="2741760" cy="363600"/>
           </a:xfrm>
           <a:prstGeom prst="rect">
             <a:avLst/>
@@ -4582,7 +4582,7 @@
         <p:spPr>
           <a:xfrm>
             <a:off x="4038480" y="6356520"/>
-            <a:ext cx="4113720" cy="363960"/>
+            <a:ext cx="4113360" cy="363600"/>
           </a:xfrm>
           <a:prstGeom prst="rect">
             <a:avLst/>
@@ -4654,7 +4654,7 @@
         <p:spPr>
           <a:xfrm>
             <a:off x="8610480" y="6356520"/>
-            <a:ext cx="2742120" cy="363960"/>
+            <a:ext cx="2741760" cy="363600"/>
           </a:xfrm>
           <a:prstGeom prst="rect">
             <a:avLst/>
@@ -4697,7 +4697,7 @@
                 <a:tab algn="l" pos="0"/>
               </a:tabLst>
             </a:pPr>
-            <a:fld id="{C67D9E03-C215-46D3-A27B-5EC094BFF204}" type="slidenum">
+            <a:fld id="{6D0C3AE8-5986-4189-BC55-237D5128EBAA}" type="slidenum">
               <a:rPr b="0" lang="en-IN" sz="1200" spc="-1" strike="noStrike">
                 <a:solidFill>
                   <a:schemeClr val="dk1">
@@ -4730,7 +4730,7 @@
         <p:spPr>
           <a:xfrm>
             <a:off x="838080" y="6356520"/>
-            <a:ext cx="2742120" cy="363960"/>
+            <a:ext cx="2741760" cy="363600"/>
           </a:xfrm>
           <a:prstGeom prst="rect">
             <a:avLst/>
@@ -5093,7 +5093,7 @@
         <p:spPr>
           <a:xfrm>
             <a:off x="0" y="411480"/>
-            <a:ext cx="12191760" cy="577440"/>
+            <a:ext cx="12191400" cy="577440"/>
           </a:xfrm>
           <a:prstGeom prst="rect">
             <a:avLst/>
@@ -5126,7 +5126,7 @@
                 </a:solidFill>
                 <a:latin typeface="Segoe UI"/>
               </a:rPr>
-              <a:t>Meet The Team</a:t>
+              <a:t>Apex Architects</a:t>
             </a:r>
             <a:endParaRPr b="0" lang="en-US" sz="3200" spc="-1" strike="noStrike">
               <a:solidFill>
@@ -5146,7 +5146,7 @@
         <p:spPr>
           <a:xfrm>
             <a:off x="5730120" y="1170360"/>
-            <a:ext cx="731160" cy="45360"/>
+            <a:ext cx="730800" cy="45000"/>
           </a:xfrm>
           <a:prstGeom prst="rect">
             <a:avLst/>
@@ -5202,7 +5202,7 @@
         <p:spPr>
           <a:xfrm>
             <a:off x="3840840" y="1828800"/>
-            <a:ext cx="1645560" cy="1645560"/>
+            <a:ext cx="1645200" cy="1645200"/>
           </a:xfrm>
           <a:prstGeom prst="rect">
             <a:avLst/>
@@ -5221,7 +5221,7 @@
         <p:spPr>
           <a:xfrm>
             <a:off x="152640" y="3584520"/>
-            <a:ext cx="2742840" cy="348840"/>
+            <a:ext cx="2742480" cy="348840"/>
           </a:xfrm>
           <a:prstGeom prst="rect">
             <a:avLst/>
@@ -5274,7 +5274,7 @@
         <p:spPr>
           <a:xfrm>
             <a:off x="1368720" y="4041720"/>
-            <a:ext cx="310680" cy="36360"/>
+            <a:ext cx="310320" cy="36000"/>
           </a:xfrm>
           <a:prstGeom prst="rect">
             <a:avLst/>
@@ -5326,7 +5326,7 @@
         <p:spPr>
           <a:xfrm>
             <a:off x="152640" y="4169520"/>
-            <a:ext cx="2742840" cy="470520"/>
+            <a:ext cx="2742480" cy="470520"/>
           </a:xfrm>
           <a:prstGeom prst="rect">
             <a:avLst/>
@@ -5401,7 +5401,7 @@
         <p:spPr>
           <a:xfrm>
             <a:off x="848160" y="5029200"/>
-            <a:ext cx="219240" cy="219240"/>
+            <a:ext cx="218880" cy="218880"/>
           </a:xfrm>
           <a:prstGeom prst="roundRect">
             <a:avLst>
@@ -5464,7 +5464,7 @@
         <p:spPr>
           <a:xfrm>
             <a:off x="1030680" y="5010840"/>
-            <a:ext cx="1261440" cy="243000"/>
+            <a:ext cx="1261080" cy="242280"/>
           </a:xfrm>
           <a:prstGeom prst="rect">
             <a:avLst/>
@@ -5529,7 +5529,7 @@
         <p:spPr>
           <a:xfrm>
             <a:off x="9784440" y="1828800"/>
-            <a:ext cx="1645560" cy="1645560"/>
+            <a:ext cx="1645200" cy="1645200"/>
           </a:xfrm>
           <a:prstGeom prst="rect">
             <a:avLst/>
@@ -5548,7 +5548,7 @@
         <p:spPr>
           <a:xfrm>
             <a:off x="3200400" y="3584520"/>
-            <a:ext cx="2742840" cy="348840"/>
+            <a:ext cx="2742480" cy="348840"/>
           </a:xfrm>
           <a:prstGeom prst="rect">
             <a:avLst/>
@@ -5601,7 +5601,7 @@
         <p:spPr>
           <a:xfrm>
             <a:off x="4416480" y="4041720"/>
-            <a:ext cx="310680" cy="36360"/>
+            <a:ext cx="310320" cy="36000"/>
           </a:xfrm>
           <a:prstGeom prst="rect">
             <a:avLst/>
@@ -5653,7 +5653,7 @@
         <p:spPr>
           <a:xfrm>
             <a:off x="3200400" y="4169520"/>
-            <a:ext cx="2742840" cy="470520"/>
+            <a:ext cx="2742480" cy="470520"/>
           </a:xfrm>
           <a:prstGeom prst="rect">
             <a:avLst/>
@@ -5728,7 +5728,7 @@
         <p:spPr>
           <a:xfrm>
             <a:off x="3931920" y="5029200"/>
-            <a:ext cx="219240" cy="219240"/>
+            <a:ext cx="218880" cy="218880"/>
           </a:xfrm>
           <a:prstGeom prst="roundRect">
             <a:avLst>
@@ -5791,7 +5791,7 @@
         <p:spPr>
           <a:xfrm>
             <a:off x="4122360" y="5010840"/>
-            <a:ext cx="885240" cy="243000"/>
+            <a:ext cx="884880" cy="242280"/>
           </a:xfrm>
           <a:prstGeom prst="rect">
             <a:avLst/>
@@ -5850,7 +5850,7 @@
         <p:spPr>
           <a:xfrm>
             <a:off x="6796800" y="1783080"/>
-            <a:ext cx="1645560" cy="1645560"/>
+            <a:ext cx="1645200" cy="1645200"/>
           </a:xfrm>
           <a:prstGeom prst="rect">
             <a:avLst/>
@@ -5869,7 +5869,7 @@
         <p:spPr>
           <a:xfrm>
             <a:off x="6248160" y="3584520"/>
-            <a:ext cx="2742840" cy="348840"/>
+            <a:ext cx="2742480" cy="348840"/>
           </a:xfrm>
           <a:prstGeom prst="rect">
             <a:avLst/>
@@ -5922,7 +5922,7 @@
         <p:spPr>
           <a:xfrm>
             <a:off x="7464240" y="4041720"/>
-            <a:ext cx="310680" cy="36360"/>
+            <a:ext cx="310320" cy="36000"/>
           </a:xfrm>
           <a:prstGeom prst="rect">
             <a:avLst/>
@@ -5974,7 +5974,7 @@
         <p:spPr>
           <a:xfrm>
             <a:off x="6248160" y="4169520"/>
-            <a:ext cx="2742840" cy="280080"/>
+            <a:ext cx="2742480" cy="280080"/>
           </a:xfrm>
           <a:prstGeom prst="rect">
             <a:avLst/>
@@ -6027,7 +6027,7 @@
         <p:spPr>
           <a:xfrm>
             <a:off x="6835680" y="5029200"/>
-            <a:ext cx="219240" cy="219240"/>
+            <a:ext cx="218880" cy="218880"/>
           </a:xfrm>
           <a:prstGeom prst="roundRect">
             <a:avLst>
@@ -6090,7 +6090,7 @@
         <p:spPr>
           <a:xfrm>
             <a:off x="7036920" y="5010840"/>
-            <a:ext cx="1440000" cy="243000"/>
+            <a:ext cx="1439640" cy="242280"/>
           </a:xfrm>
           <a:prstGeom prst="rect">
             <a:avLst/>
@@ -6149,7 +6149,7 @@
         <p:spPr>
           <a:xfrm>
             <a:off x="869040" y="1828800"/>
-            <a:ext cx="1645560" cy="1645560"/>
+            <a:ext cx="1645200" cy="1645200"/>
           </a:xfrm>
           <a:prstGeom prst="rect">
             <a:avLst/>
@@ -6168,7 +6168,7 @@
         <p:spPr>
           <a:xfrm>
             <a:off x="9296640" y="3584520"/>
-            <a:ext cx="2742840" cy="348840"/>
+            <a:ext cx="2742480" cy="348840"/>
           </a:xfrm>
           <a:prstGeom prst="rect">
             <a:avLst/>
@@ -6221,7 +6221,7 @@
         <p:spPr>
           <a:xfrm>
             <a:off x="10512720" y="4041720"/>
-            <a:ext cx="310680" cy="36360"/>
+            <a:ext cx="310320" cy="36000"/>
           </a:xfrm>
           <a:prstGeom prst="rect">
             <a:avLst/>
@@ -6273,7 +6273,7 @@
         <p:spPr>
           <a:xfrm>
             <a:off x="9296640" y="4169520"/>
-            <a:ext cx="2742840" cy="470520"/>
+            <a:ext cx="2742480" cy="470520"/>
           </a:xfrm>
           <a:prstGeom prst="rect">
             <a:avLst/>
@@ -6348,7 +6348,7 @@
         <p:spPr>
           <a:xfrm>
             <a:off x="10028160" y="5029200"/>
-            <a:ext cx="219240" cy="219240"/>
+            <a:ext cx="218880" cy="218880"/>
           </a:xfrm>
           <a:prstGeom prst="roundRect">
             <a:avLst>
@@ -6411,7 +6411,7 @@
         <p:spPr>
           <a:xfrm>
             <a:off x="10307160" y="5010840"/>
-            <a:ext cx="996480" cy="243000"/>
+            <a:ext cx="996120" cy="242280"/>
           </a:xfrm>
           <a:prstGeom prst="rect">
             <a:avLst/>
@@ -6466,7 +6466,7 @@
         <p:spPr>
           <a:xfrm>
             <a:off x="457200" y="6711840"/>
-            <a:ext cx="11277000" cy="18000"/>
+            <a:ext cx="11276640" cy="17640"/>
           </a:xfrm>
           <a:prstGeom prst="rect">
             <a:avLst/>
@@ -6560,7 +6560,7 @@
         <a:srgbClr val="9454c3"/>
       </a:hlink>
       <a:folHlink>
-        <a:srgbClr val="0000-1"/>
+        <a:srgbClr val="000000"/>
       </a:folHlink>
     </a:clrScheme>
     <a:fontScheme name="Office">

--- a/assets/Meet_Team_Apex_Architects.pptx
+++ b/assets/Meet_Team_Apex_Architects.pptx
@@ -153,7 +153,7 @@
         <p:txBody>
           <a:bodyPr/>
           <a:p>
-            <a:fld id="{0BC107B5-5969-49BD-AD31-64BF8D6BBD83}" type="slidenum">
+            <a:fld id="{844F818E-C38A-4B55-8F79-C90D182C9753}" type="slidenum">
               <a:t>&lt;#&gt;</a:t>
             </a:fld>
           </a:p>
@@ -236,7 +236,7 @@
         <p:txBody>
           <a:bodyPr/>
           <a:p>
-            <a:fld id="{B7DC2AC7-A06C-49F9-A04A-B5E57296ED12}" type="slidenum">
+            <a:fld id="{4A1BAA1B-82B5-4B24-BFEA-B3CBBB970C8C}" type="slidenum">
               <a:t>&lt;#&gt;</a:t>
             </a:fld>
           </a:p>
@@ -319,7 +319,7 @@
         <p:txBody>
           <a:bodyPr/>
           <a:p>
-            <a:fld id="{A701C42A-780B-43F4-B0B0-120ED822AD5F}" type="slidenum">
+            <a:fld id="{DE63A0A5-8444-423E-9993-DAD7F330D9E6}" type="slidenum">
               <a:t>&lt;#&gt;</a:t>
             </a:fld>
           </a:p>
@@ -402,7 +402,7 @@
         <p:txBody>
           <a:bodyPr/>
           <a:p>
-            <a:fld id="{E5E7C8ED-31D8-4DA5-A4F3-569740F08A55}" type="slidenum">
+            <a:fld id="{456D35F9-A945-4A73-BE44-0BAB48B13DD1}" type="slidenum">
               <a:t>&lt;#&gt;</a:t>
             </a:fld>
           </a:p>
@@ -485,7 +485,7 @@
         <p:txBody>
           <a:bodyPr/>
           <a:p>
-            <a:fld id="{FE0DA969-86D0-41C7-8612-6ED6AB404AB1}" type="slidenum">
+            <a:fld id="{6419DB53-A92A-4936-AEFE-322CCAA0D80B}" type="slidenum">
               <a:t>&lt;#&gt;</a:t>
             </a:fld>
           </a:p>
@@ -651,7 +651,7 @@
         <p:txBody>
           <a:bodyPr/>
           <a:p>
-            <a:fld id="{BC419809-A256-417B-A347-236A5FC0AE2B}" type="slidenum">
+            <a:fld id="{4E818135-AF91-455A-BE31-AEAEB3674994}" type="slidenum">
               <a:t>&lt;#&gt;</a:t>
             </a:fld>
           </a:p>
@@ -734,7 +734,7 @@
         <p:txBody>
           <a:bodyPr/>
           <a:p>
-            <a:fld id="{6D6C1144-36FF-487E-8BAD-A0C682A2B254}" type="slidenum">
+            <a:fld id="{3AB1F5FE-E467-4674-A176-15FED1463564}" type="slidenum">
               <a:t>&lt;#&gt;</a:t>
             </a:fld>
           </a:p>
@@ -943,7 +943,7 @@
         <p:txBody>
           <a:bodyPr/>
           <a:p>
-            <a:fld id="{2F770F58-4E39-4EBC-8F38-C48145C38DDC}" type="slidenum">
+            <a:fld id="{2776FE85-B0FD-47B8-9636-20CAC857F01F}" type="slidenum">
               <a:t>&lt;#&gt;</a:t>
             </a:fld>
           </a:p>
@@ -1026,7 +1026,7 @@
         <p:txBody>
           <a:bodyPr/>
           <a:p>
-            <a:fld id="{42C8BD14-87BC-48BD-A221-D5CAB405F84D}" type="slidenum">
+            <a:fld id="{DBC4F471-53DD-4F08-A645-0234901E5FD1}" type="slidenum">
               <a:t>&lt;#&gt;</a:t>
             </a:fld>
           </a:p>
@@ -1149,7 +1149,7 @@
         <p:txBody>
           <a:bodyPr/>
           <a:p>
-            <a:fld id="{CA70CA94-D3D2-441C-9ED4-1E42CF981279}" type="slidenum">
+            <a:fld id="{87780A86-B0FF-4205-9BA3-DD70F99EE154}" type="slidenum">
               <a:t>&lt;#&gt;</a:t>
             </a:fld>
           </a:p>
@@ -1232,7 +1232,7 @@
         <p:txBody>
           <a:bodyPr/>
           <a:p>
-            <a:fld id="{B3345E2D-64D4-45FD-8542-8FFAC3CEB332}" type="slidenum">
+            <a:fld id="{5AF6A3D2-E9B5-4853-A3A6-7BAC2B240EA5}" type="slidenum">
               <a:t>&lt;#&gt;</a:t>
             </a:fld>
           </a:p>
@@ -1465,7 +1465,7 @@
                 <a:tab algn="l" pos="0"/>
               </a:tabLst>
             </a:pPr>
-            <a:fld id="{C58BFAFA-2193-45BE-9803-4455DE732C65}" type="slidenum">
+            <a:fld id="{D5191FE2-0215-4326-8FC0-6F5635742994}" type="slidenum">
               <a:rPr b="0" lang="en-IN" sz="1200" spc="-1" strike="noStrike">
                 <a:solidFill>
                   <a:schemeClr val="dk1">
@@ -1706,7 +1706,7 @@
                 <a:tab algn="l" pos="0"/>
               </a:tabLst>
             </a:pPr>
-            <a:fld id="{120E0D53-8901-48BE-9048-D7921DEC8E90}" type="slidenum">
+            <a:fld id="{6FD90DBF-E07B-4F60-89CF-2F316CFF75E9}" type="slidenum">
               <a:rPr b="0" lang="en-IN" sz="1200" spc="-1" strike="noStrike">
                 <a:solidFill>
                   <a:schemeClr val="dk1">
@@ -1947,7 +1947,7 @@
                 <a:tab algn="l" pos="0"/>
               </a:tabLst>
             </a:pPr>
-            <a:fld id="{3B54AC89-0413-4C79-9233-1A33437DBFC1}" type="slidenum">
+            <a:fld id="{C5B9EA48-B9D5-4D36-A78A-382B2DC6003B}" type="slidenum">
               <a:rPr b="0" lang="en-IN" sz="1200" spc="-1" strike="noStrike">
                 <a:solidFill>
                   <a:schemeClr val="dk1">
@@ -2188,7 +2188,7 @@
                 <a:tab algn="l" pos="0"/>
               </a:tabLst>
             </a:pPr>
-            <a:fld id="{C5695933-21D4-47EE-B12C-B8437457EE6C}" type="slidenum">
+            <a:fld id="{BA6B17A6-AF2B-4B42-898E-5F1B56A01926}" type="slidenum">
               <a:rPr b="0" lang="en-IN" sz="1200" spc="-1" strike="noStrike">
                 <a:solidFill>
                   <a:schemeClr val="dk1">
@@ -2429,7 +2429,7 @@
                 <a:tab algn="l" pos="0"/>
               </a:tabLst>
             </a:pPr>
-            <a:fld id="{C684BCAE-FA30-4EB2-B866-18670912859E}" type="slidenum">
+            <a:fld id="{41AB2B36-A15E-43D0-9D8D-55C6B09F02EF}" type="slidenum">
               <a:rPr b="0" lang="en-IN" sz="1200" spc="-1" strike="noStrike">
                 <a:solidFill>
                   <a:schemeClr val="dk1">
@@ -2944,7 +2944,7 @@
                 <a:tab algn="l" pos="0"/>
               </a:tabLst>
             </a:pPr>
-            <a:fld id="{2A7C5B5D-C18D-4D09-8AA1-C47D8D77C5F3}" type="slidenum">
+            <a:fld id="{971CAAED-9784-4FBD-B761-7B042D4AC802}" type="slidenum">
               <a:rPr b="0" lang="en-IN" sz="1200" spc="-1" strike="noStrike">
                 <a:solidFill>
                   <a:schemeClr val="dk1">
@@ -3185,7 +3185,7 @@
                 <a:tab algn="l" pos="0"/>
               </a:tabLst>
             </a:pPr>
-            <a:fld id="{1D1CE3FC-DD58-4DD0-BE0E-8823012F0A4F}" type="slidenum">
+            <a:fld id="{4AA8947B-59E1-4979-B6FD-9CCE109F54B1}" type="slidenum">
               <a:rPr b="0" lang="en-IN" sz="1200" spc="-1" strike="noStrike">
                 <a:solidFill>
                   <a:schemeClr val="dk1">
@@ -3925,7 +3925,7 @@
                 <a:tab algn="l" pos="0"/>
               </a:tabLst>
             </a:pPr>
-            <a:fld id="{33A466E4-5988-435B-ABEA-6272A18105AE}" type="slidenum">
+            <a:fld id="{66B035D4-4751-4508-8EA3-1C9BEC1127A2}" type="slidenum">
               <a:rPr b="0" lang="en-IN" sz="1200" spc="-1" strike="noStrike">
                 <a:solidFill>
                   <a:schemeClr val="dk1">
@@ -4166,7 +4166,7 @@
                 <a:tab algn="l" pos="0"/>
               </a:tabLst>
             </a:pPr>
-            <a:fld id="{1F4C61CE-8B15-4406-BF23-CF8AF4B1FCE7}" type="slidenum">
+            <a:fld id="{DFF7E2A0-10C5-4F5C-AFDA-F133968B7FC7}" type="slidenum">
               <a:rPr b="0" lang="en-IN" sz="1200" spc="-1" strike="noStrike">
                 <a:solidFill>
                   <a:schemeClr val="dk1">
@@ -4456,7 +4456,7 @@
                 <a:tab algn="l" pos="0"/>
               </a:tabLst>
             </a:pPr>
-            <a:fld id="{D34F6B89-5522-44FB-99D1-87E65CB61735}" type="slidenum">
+            <a:fld id="{1213D49C-8167-404C-AF1A-C8D521910C5D}" type="slidenum">
               <a:rPr b="0" lang="en-IN" sz="1200" spc="-1" strike="noStrike">
                 <a:solidFill>
                   <a:schemeClr val="dk1">
@@ -4697,7 +4697,7 @@
                 <a:tab algn="l" pos="0"/>
               </a:tabLst>
             </a:pPr>
-            <a:fld id="{6D0C3AE8-5986-4189-BC55-237D5128EBAA}" type="slidenum">
+            <a:fld id="{40F8DBC0-0644-4D3C-B853-D6028CE20B11}" type="slidenum">
               <a:rPr b="0" lang="en-IN" sz="1200" spc="-1" strike="noStrike">
                 <a:solidFill>
                   <a:schemeClr val="dk1">
@@ -5400,7 +5400,7 @@
         </p:nvSpPr>
         <p:spPr>
           <a:xfrm>
-            <a:off x="848160" y="5029200"/>
+            <a:off x="848160" y="4921200"/>
             <a:ext cx="218880" cy="218880"/>
           </a:xfrm>
           <a:prstGeom prst="roundRect">
@@ -5463,7 +5463,7 @@
         </p:nvSpPr>
         <p:spPr>
           <a:xfrm>
-            <a:off x="1030680" y="5010840"/>
+            <a:off x="1030680" y="4902840"/>
             <a:ext cx="1261080" cy="242280"/>
           </a:xfrm>
           <a:prstGeom prst="rect">
@@ -5727,7 +5727,7 @@
         </p:nvSpPr>
         <p:spPr>
           <a:xfrm>
-            <a:off x="3931920" y="5029200"/>
+            <a:off x="3931920" y="4921200"/>
             <a:ext cx="218880" cy="218880"/>
           </a:xfrm>
           <a:prstGeom prst="roundRect">
@@ -5790,7 +5790,7 @@
         </p:nvSpPr>
         <p:spPr>
           <a:xfrm>
-            <a:off x="4122360" y="5010840"/>
+            <a:off x="4122360" y="4902840"/>
             <a:ext cx="884880" cy="242280"/>
           </a:xfrm>
           <a:prstGeom prst="rect">
@@ -6026,7 +6026,7 @@
         </p:nvSpPr>
         <p:spPr>
           <a:xfrm>
-            <a:off x="6835680" y="5029200"/>
+            <a:off x="6835680" y="4921200"/>
             <a:ext cx="218880" cy="218880"/>
           </a:xfrm>
           <a:prstGeom prst="roundRect">
@@ -6089,7 +6089,7 @@
         </p:nvSpPr>
         <p:spPr>
           <a:xfrm>
-            <a:off x="7036920" y="5010840"/>
+            <a:off x="7036920" y="4902840"/>
             <a:ext cx="1439640" cy="242280"/>
           </a:xfrm>
           <a:prstGeom prst="rect">
@@ -6347,7 +6347,7 @@
         </p:nvSpPr>
         <p:spPr>
           <a:xfrm>
-            <a:off x="10028160" y="5029200"/>
+            <a:off x="10028160" y="4921200"/>
             <a:ext cx="218880" cy="218880"/>
           </a:xfrm>
           <a:prstGeom prst="roundRect">
@@ -6410,7 +6410,7 @@
         </p:nvSpPr>
         <p:spPr>
           <a:xfrm>
-            <a:off x="10307160" y="5010840"/>
+            <a:off x="10307160" y="4902840"/>
             <a:ext cx="996120" cy="242280"/>
           </a:xfrm>
           <a:prstGeom prst="rect">
@@ -6500,6 +6500,174 @@
                 <a:spcPct val="100000"/>
               </a:lnSpc>
             </a:pPr>
+            <a:endParaRPr b="0" lang="en-US" sz="1800" spc="-1" strike="noStrike">
+              <a:solidFill>
+                <a:schemeClr val="lt1"/>
+              </a:solidFill>
+              <a:latin typeface="Calibri"/>
+            </a:endParaRPr>
+          </a:p>
+        </p:txBody>
+      </p:sp>
+      <p:sp>
+        <p:nvSpPr>
+          <p:cNvPr id="77" name="TextBox 2"/>
+          <p:cNvSpPr/>
+          <p:nvPr/>
+        </p:nvSpPr>
+        <p:spPr>
+          <a:xfrm>
+            <a:off x="0" y="411480"/>
+            <a:ext cx="12191400" cy="577440"/>
+          </a:xfrm>
+          <a:prstGeom prst="rect">
+            <a:avLst/>
+          </a:prstGeom>
+          <a:noFill/>
+          <a:ln w="0">
+            <a:noFill/>
+          </a:ln>
+        </p:spPr>
+        <p:style>
+          <a:lnRef idx="0"/>
+          <a:fillRef idx="0"/>
+          <a:effectRef idx="0"/>
+          <a:fontRef idx="minor"/>
+        </p:style>
+        <p:txBody>
+          <a:bodyPr lIns="90000" rIns="90000" tIns="45000" bIns="45000" anchor="t">
+            <a:spAutoFit/>
+          </a:bodyPr>
+          <a:p>
+            <a:pPr algn="ctr">
+              <a:lnSpc>
+                <a:spcPct val="100000"/>
+              </a:lnSpc>
+            </a:pPr>
+            <a:r>
+              <a:rPr b="1" lang="en-US" sz="3200" spc="-1" strike="noStrike">
+                <a:solidFill>
+                  <a:srgbClr val="2c3e50"/>
+                </a:solidFill>
+                <a:latin typeface="Segoe UI"/>
+              </a:rPr>
+              <a:t>Apex Architects</a:t>
+            </a:r>
+            <a:endParaRPr b="0" lang="en-US" sz="3200" spc="-1" strike="noStrike">
+              <a:solidFill>
+                <a:srgbClr val="000000"/>
+              </a:solidFill>
+              <a:latin typeface="Arial"/>
+            </a:endParaRPr>
+          </a:p>
+        </p:txBody>
+      </p:sp>
+      <p:sp>
+        <p:nvSpPr>
+          <p:cNvPr id="78" name="TextBox 3"/>
+          <p:cNvSpPr/>
+          <p:nvPr/>
+        </p:nvSpPr>
+        <p:spPr>
+          <a:xfrm>
+            <a:off x="0" y="5703480"/>
+            <a:ext cx="12191400" cy="577440"/>
+          </a:xfrm>
+          <a:prstGeom prst="rect">
+            <a:avLst/>
+          </a:prstGeom>
+          <a:noFill/>
+          <a:ln w="0">
+            <a:noFill/>
+          </a:ln>
+        </p:spPr>
+        <p:style>
+          <a:lnRef idx="0"/>
+          <a:fillRef idx="0"/>
+          <a:effectRef idx="0"/>
+          <a:fontRef idx="minor"/>
+        </p:style>
+        <p:txBody>
+          <a:bodyPr lIns="90000" rIns="90000" tIns="45000" bIns="45000" anchor="t">
+            <a:spAutoFit/>
+          </a:bodyPr>
+          <a:p>
+            <a:pPr algn="ctr">
+              <a:lnSpc>
+                <a:spcPct val="100000"/>
+              </a:lnSpc>
+              <a:spcBef>
+                <a:spcPts val="1191"/>
+              </a:spcBef>
+              <a:spcAft>
+                <a:spcPts val="992"/>
+              </a:spcAft>
+            </a:pPr>
+            <a:r>
+              <a:rPr b="1" lang="en-US" sz="3200" spc="-1" strike="noStrike">
+                <a:solidFill>
+                  <a:srgbClr val="2c3e50"/>
+                </a:solidFill>
+                <a:latin typeface="Segoe UI"/>
+              </a:rPr>
+              <a:t> </a:t>
+            </a:r>
+            <a:r>
+              <a:rPr b="1" lang="en-US" sz="3200" spc="-1" strike="noStrike">
+                <a:solidFill>
+                  <a:srgbClr val="2c3e50"/>
+                </a:solidFill>
+                <a:latin typeface="Segoe UI"/>
+              </a:rPr>
+              <a:t>O'reilly Architectural Katas - 2026</a:t>
+            </a:r>
+            <a:endParaRPr b="0" lang="en-US" sz="3200" spc="-1" strike="noStrike">
+              <a:solidFill>
+                <a:srgbClr val="000000"/>
+              </a:solidFill>
+              <a:latin typeface="Arial"/>
+            </a:endParaRPr>
+          </a:p>
+        </p:txBody>
+      </p:sp>
+      <p:sp>
+        <p:nvSpPr>
+          <p:cNvPr id="79" name="Rectangle 1"/>
+          <p:cNvSpPr/>
+          <p:nvPr/>
+        </p:nvSpPr>
+        <p:spPr>
+          <a:xfrm>
+            <a:off x="5730120" y="6390360"/>
+            <a:ext cx="730800" cy="45000"/>
+          </a:xfrm>
+          <a:prstGeom prst="rect">
+            <a:avLst/>
+          </a:prstGeom>
+          <a:solidFill>
+            <a:srgbClr val="c9baa8"/>
+          </a:solidFill>
+          <a:ln>
+            <a:noFill/>
+          </a:ln>
+        </p:spPr>
+        <p:style>
+          <a:lnRef idx="1">
+            <a:schemeClr val="accent1"/>
+          </a:lnRef>
+          <a:fillRef idx="3">
+            <a:schemeClr val="accent1"/>
+          </a:fillRef>
+          <a:effectRef idx="2">
+            <a:schemeClr val="accent1"/>
+          </a:effectRef>
+          <a:fontRef idx="minor"/>
+        </p:style>
+        <p:txBody>
+          <a:bodyPr lIns="90000" rIns="90000" tIns="720" bIns="720" anchor="ctr">
+            <a:noAutofit/>
+          </a:bodyPr>
+          <a:p>
             <a:endParaRPr b="0" lang="en-US" sz="1800" spc="-1" strike="noStrike">
               <a:solidFill>
                 <a:schemeClr val="lt1"/>
